--- a/BACKUP&RECOVERY/16장/16장_RMAN_고급복구와_블록손상복구.pptx
+++ b/BACKUP&RECOVERY/16장/16장_RMAN_고급복구와_블록손상복구.pptx
@@ -7743,7 +7743,7 @@
                 <a:latin typeface="Consolas"/>
                 <a:ea typeface="Consolas"/>
               </a:rPr>
-              <a:t>ORA-01110: data file 7: '/u02/oradata/ORCL/users01.dbf'</a:t>
+              <a:t>ORA-01110: data file 7: '/u01/app/oracle/oradata/orcl/users01.dbf'</a:t>
             </a:r>
           </a:p>
           <a:p>
@@ -7913,7 +7913,7 @@
                 <a:latin typeface="Consolas"/>
                 <a:ea typeface="Consolas"/>
               </a:rPr>
-              <a:t>[oracle@oel7v9r1 ~]$ dbv file=/u02/oradata/ORCL/users01.dbf blocksize=8192</a:t>
+              <a:t>[oracle@oel7v9r1 ~]$ dbv file=/u01/app/oracle/oradata/orcl/users01.dbf blocksize=8192</a:t>
             </a:r>
           </a:p>
           <a:p>
@@ -8636,7 +8636,7 @@
                 <a:latin typeface="Consolas"/>
                 <a:ea typeface="Consolas"/>
               </a:rPr>
-              <a:t> /u02/oradata/ORCL/users01.dbf</a:t>
+              <a:t> /u01/app/oracle/oradata/orcl/users01.dbf</a:t>
             </a:r>
           </a:p>
           <a:p>
